--- a/assets/powerpoints/module-restaurant/B2-je-voudrais-pourriez-vous.pptx
+++ b/assets/powerpoints/module-restaurant/B2-je-voudrais-pourriez-vous.pptx
@@ -10330,7 +10330,25 @@
                 </a:solidFill>
                 <a:latin typeface="Verdana"/>
               </a:rPr>
-              <a:t>vouloir › je voudrais · pouvoir › pourriez-vous · avoir › auriez-vous · être › ce serait. Les terminaisons sont &lt;b&gt;-ais, -ais, -ait, -ions, -iez, -aient&lt;/b&gt;. À ce niveau, apprenez-les comme des expressions.</a:t>
+              <a:t>vouloir › je voudrais · pouvoir › pourriez-vous · avoir › auriez-vous · être › ce serait. Les terminaisons sont </a:t>
+            </a:r>
+            <a:r>
+              <a:rPr sz="2000" b="1" i="0">
+                <a:solidFill>
+                  <a:srgbClr val="4B4F52"/>
+                </a:solidFill>
+                <a:latin typeface="Verdana"/>
+              </a:rPr>
+              <a:t>-ais, -ais, -ait, -ions, -iez, -aient</a:t>
+            </a:r>
+            <a:r>
+              <a:rPr sz="2000" b="0" i="0">
+                <a:solidFill>
+                  <a:srgbClr val="4B4F52"/>
+                </a:solidFill>
+                <a:latin typeface="Verdana"/>
+              </a:rPr>
+              <a:t>. À ce niveau, apprenez-les comme des expressions.</a:t>
             </a:r>
           </a:p>
         </p:txBody>
